--- a/material/4_WEB/01_HTML.pptx
+++ b/material/4_WEB/01_HTML.pptx
@@ -282,7 +282,7 @@
             <a:fld id="{A13A867C-D490-40C2-AB8D-A60FA70A9BF5}" type="datetimeFigureOut">
               <a:rPr lang="ko-KR" altLang="en-US" smtClean="0"/>
               <a:pPr/>
-              <a:t>2026-01-06</a:t>
+              <a:t>2026-01-15</a:t>
             </a:fld>
             <a:endParaRPr lang="ko-KR" altLang="en-US" dirty="0"/>
           </a:p>
@@ -4454,7 +4454,7 @@
           <a:p>
             <a:fld id="{442BEE3F-2E9A-4FD8-8B8A-8619F3E161C0}" type="datetime1">
               <a:rPr lang="ko-KR" altLang="en-US" smtClean="0"/>
-              <a:t>2026-01-06</a:t>
+              <a:t>2026-01-15</a:t>
             </a:fld>
             <a:endParaRPr lang="ko-KR" altLang="en-US"/>
           </a:p>
@@ -4741,7 +4741,7 @@
           <a:p>
             <a:fld id="{0F78D9C4-20C1-4B15-A116-16DC77AD9A1E}" type="datetime1">
               <a:rPr lang="ko-KR" altLang="en-US" smtClean="0"/>
-              <a:t>2026-01-06</a:t>
+              <a:t>2026-01-15</a:t>
             </a:fld>
             <a:endParaRPr lang="ko-KR" altLang="en-US"/>
           </a:p>
@@ -4916,7 +4916,7 @@
           <a:p>
             <a:fld id="{7F5E23C3-0E3D-4E4E-8486-D7FB4C073DC1}" type="datetime1">
               <a:rPr lang="ko-KR" altLang="en-US" smtClean="0"/>
-              <a:t>2026-01-06</a:t>
+              <a:t>2026-01-15</a:t>
             </a:fld>
             <a:endParaRPr lang="ko-KR" altLang="en-US"/>
           </a:p>
@@ -5450,7 +5450,7 @@
           <a:p>
             <a:fld id="{7F5E23C3-0E3D-4E4E-8486-D7FB4C073DC1}" type="datetime1">
               <a:rPr lang="ko-KR" altLang="en-US" smtClean="0"/>
-              <a:t>2026-01-06</a:t>
+              <a:t>2026-01-15</a:t>
             </a:fld>
             <a:endParaRPr lang="ko-KR" altLang="en-US"/>
           </a:p>
@@ -7052,7 +7052,7 @@
           <a:p>
             <a:fld id="{D6D095D9-1944-4F99-AAE6-350D623C222B}" type="datetime1">
               <a:rPr lang="ko-KR" altLang="en-US" smtClean="0"/>
-              <a:t>2026-01-06</a:t>
+              <a:t>2026-01-15</a:t>
             </a:fld>
             <a:endParaRPr lang="ko-KR" altLang="en-US"/>
           </a:p>
@@ -7486,7 +7486,7 @@
           <a:p>
             <a:fld id="{F84450A5-EEAC-4EB9-A4BB-3194074132F5}" type="datetime1">
               <a:rPr lang="ko-KR" altLang="en-US" smtClean="0"/>
-              <a:t>2026-01-06</a:t>
+              <a:t>2026-01-15</a:t>
             </a:fld>
             <a:endParaRPr lang="ko-KR" altLang="en-US"/>
           </a:p>
@@ -7676,7 +7676,7 @@
           <a:p>
             <a:fld id="{9450A541-7613-44B4-B513-FCD596176F9F}" type="datetime1">
               <a:rPr lang="ko-KR" altLang="en-US" smtClean="0"/>
-              <a:t>2026-01-06</a:t>
+              <a:t>2026-01-15</a:t>
             </a:fld>
             <a:endParaRPr lang="ko-KR" altLang="en-US"/>
           </a:p>
@@ -8093,7 +8093,7 @@
           <a:p>
             <a:fld id="{41BE54F0-E21D-4792-A98D-B7ACEB0EFA6C}" type="datetime1">
               <a:rPr lang="ko-KR" altLang="en-US" smtClean="0"/>
-              <a:t>2026-01-06</a:t>
+              <a:t>2026-01-15</a:t>
             </a:fld>
             <a:endParaRPr lang="ko-KR" altLang="en-US" dirty="0"/>
           </a:p>
@@ -8362,7 +8362,7 @@
           <a:p>
             <a:fld id="{8143C937-8F0D-4DAD-A6A4-A8429524E696}" type="datetime1">
               <a:rPr lang="ko-KR" altLang="en-US" smtClean="0"/>
-              <a:t>2026-01-06</a:t>
+              <a:t>2026-01-15</a:t>
             </a:fld>
             <a:endParaRPr lang="ko-KR" altLang="en-US"/>
           </a:p>
@@ -11883,7 +11883,7 @@
           <a:p>
             <a:fld id="{0476D48C-8DCB-41F1-ABBC-B8FF679AC18D}" type="datetime1">
               <a:rPr lang="ko-KR" altLang="en-US" smtClean="0"/>
-              <a:t>2026-01-06</a:t>
+              <a:t>2026-01-15</a:t>
             </a:fld>
             <a:endParaRPr lang="ko-KR" altLang="en-US"/>
           </a:p>
@@ -12714,7 +12714,7 @@
           <a:p>
             <a:fld id="{BE92A0B0-3066-4F8E-9BAC-0ECCBF49FC15}" type="datetime1">
               <a:rPr lang="ko-KR" altLang="en-US" smtClean="0"/>
-              <a:t>2026-01-06</a:t>
+              <a:t>2026-01-15</a:t>
             </a:fld>
             <a:endParaRPr lang="ko-KR" altLang="en-US"/>
           </a:p>
@@ -12928,7 +12928,7 @@
           <a:p>
             <a:fld id="{351429AF-CDF6-414F-9A6D-850B604A3A93}" type="datetime1">
               <a:rPr lang="ko-KR" altLang="en-US" smtClean="0"/>
-              <a:t>2026-01-06</a:t>
+              <a:t>2026-01-15</a:t>
             </a:fld>
             <a:endParaRPr lang="ko-KR" altLang="en-US"/>
           </a:p>
@@ -13242,7 +13242,7 @@
           <a:p>
             <a:fld id="{98BD38DC-8B64-47A0-A830-1FF09837E62A}" type="datetime1">
               <a:rPr lang="ko-KR" altLang="en-US" smtClean="0"/>
-              <a:t>2026-01-06</a:t>
+              <a:t>2026-01-15</a:t>
             </a:fld>
             <a:endParaRPr lang="ko-KR" altLang="en-US"/>
           </a:p>
@@ -13524,7 +13524,7 @@
           <a:p>
             <a:fld id="{25459FD3-5012-417D-9896-27B045C7CD66}" type="datetime1">
               <a:rPr lang="ko-KR" altLang="en-US" smtClean="0"/>
-              <a:t>2026-01-06</a:t>
+              <a:t>2026-01-15</a:t>
             </a:fld>
             <a:endParaRPr lang="ko-KR" altLang="en-US"/>
           </a:p>
@@ -14209,7 +14209,7 @@
           <a:p>
             <a:fld id="{A6408BAE-7F50-4B88-B7A1-F6A865A29A4B}" type="datetime1">
               <a:rPr lang="ko-KR" altLang="en-US" smtClean="0"/>
-              <a:t>2026-01-06</a:t>
+              <a:t>2026-01-15</a:t>
             </a:fld>
             <a:endParaRPr lang="ko-KR" altLang="en-US"/>
           </a:p>
@@ -15220,7 +15220,7 @@
           <a:p>
             <a:fld id="{C4D18CED-2597-4667-A518-B6308FA44F17}" type="datetime1">
               <a:rPr lang="ko-KR" altLang="en-US" smtClean="0"/>
-              <a:t>2026-01-06</a:t>
+              <a:t>2026-01-15</a:t>
             </a:fld>
             <a:endParaRPr lang="ko-KR" altLang="en-US"/>
           </a:p>
@@ -15535,7 +15535,7 @@
           <a:p>
             <a:fld id="{1A385C8E-84F8-4DED-A0D7-2C67F0F12C0A}" type="datetime1">
               <a:rPr lang="ko-KR" altLang="en-US" smtClean="0"/>
-              <a:t>2026-01-06</a:t>
+              <a:t>2026-01-15</a:t>
             </a:fld>
             <a:endParaRPr lang="ko-KR" altLang="en-US"/>
           </a:p>
@@ -15778,7 +15778,7 @@
           <a:p>
             <a:fld id="{0F78D9C4-20C1-4B15-A116-16DC77AD9A1E}" type="datetime1">
               <a:rPr lang="ko-KR" altLang="en-US" smtClean="0"/>
-              <a:t>2026-01-06</a:t>
+              <a:t>2026-01-15</a:t>
             </a:fld>
             <a:endParaRPr lang="ko-KR" altLang="en-US"/>
           </a:p>
@@ -16136,7 +16136,7 @@
           <a:p>
             <a:fld id="{CD59933F-0537-40E7-B48D-B5C53C90AF6F}" type="datetime1">
               <a:rPr lang="ko-KR" altLang="en-US" smtClean="0"/>
-              <a:t>2026-01-06</a:t>
+              <a:t>2026-01-15</a:t>
             </a:fld>
             <a:endParaRPr lang="ko-KR" altLang="en-US"/>
           </a:p>
@@ -16305,7 +16305,7 @@
           <a:p>
             <a:fld id="{A39B24CD-2281-47EB-83C5-6799704FD369}" type="datetime1">
               <a:rPr lang="ko-KR" altLang="en-US" smtClean="0"/>
-              <a:t>2026-01-06</a:t>
+              <a:t>2026-01-15</a:t>
             </a:fld>
             <a:endParaRPr lang="ko-KR" altLang="en-US"/>
           </a:p>
@@ -16495,7 +16495,7 @@
           <a:p>
             <a:fld id="{90F4BD02-BEFC-43DA-BA86-BED505C5AF55}" type="datetime1">
               <a:rPr lang="ko-KR" altLang="en-US" smtClean="0"/>
-              <a:t>2026-01-06</a:t>
+              <a:t>2026-01-15</a:t>
             </a:fld>
             <a:endParaRPr lang="ko-KR" altLang="en-US"/>
           </a:p>
@@ -16659,7 +16659,7 @@
           <a:p>
             <a:fld id="{892FD069-7B29-400B-B981-595818B69B15}" type="datetime1">
               <a:rPr lang="ko-KR" altLang="en-US" smtClean="0"/>
-              <a:t>2026-01-06</a:t>
+              <a:t>2026-01-15</a:t>
             </a:fld>
             <a:endParaRPr lang="ko-KR" altLang="en-US"/>
           </a:p>
@@ -17385,7 +17385,7 @@
           <a:p>
             <a:fld id="{B6DE8D43-5FBB-4E05-B937-AB6CE5001749}" type="datetime1">
               <a:rPr lang="ko-KR" altLang="en-US" smtClean="0"/>
-              <a:t>2026-01-06</a:t>
+              <a:t>2026-01-15</a:t>
             </a:fld>
             <a:endParaRPr lang="ko-KR" altLang="en-US"/>
           </a:p>
@@ -17647,7 +17647,7 @@
           <a:p>
             <a:fld id="{DE33AB3D-ED5C-49D6-9C89-3645790B91E0}" type="datetime1">
               <a:rPr lang="ko-KR" altLang="en-US" smtClean="0"/>
-              <a:t>2026-01-06</a:t>
+              <a:t>2026-01-15</a:t>
             </a:fld>
             <a:endParaRPr lang="ko-KR" altLang="en-US"/>
           </a:p>
@@ -17926,7 +17926,7 @@
           <a:p>
             <a:fld id="{034852E9-5473-496C-B8E6-F7D738D9B5F2}" type="datetime1">
               <a:rPr lang="ko-KR" altLang="en-US" smtClean="0"/>
-              <a:t>2026-01-06</a:t>
+              <a:t>2026-01-15</a:t>
             </a:fld>
             <a:endParaRPr lang="ko-KR" altLang="en-US" dirty="0"/>
           </a:p>
@@ -18284,7 +18284,7 @@
           <a:p>
             <a:fld id="{74B74413-D8B3-44FE-9460-DC12566AE16A}" type="datetime1">
               <a:rPr lang="ko-KR" altLang="en-US" smtClean="0"/>
-              <a:t>2026-01-06</a:t>
+              <a:t>2026-01-15</a:t>
             </a:fld>
             <a:endParaRPr lang="ko-KR" altLang="en-US"/>
           </a:p>
@@ -19471,7 +19471,7 @@
           <a:p>
             <a:fld id="{F6093437-8AFD-4903-BC6B-CF849953625C}" type="datetime1">
               <a:rPr lang="ko-KR" altLang="en-US" smtClean="0"/>
-              <a:t>2026-01-06</a:t>
+              <a:t>2026-01-15</a:t>
             </a:fld>
             <a:endParaRPr lang="ko-KR" altLang="en-US"/>
           </a:p>
@@ -19598,7 +19598,7 @@
           <a:p>
             <a:fld id="{0F78D9C4-20C1-4B15-A116-16DC77AD9A1E}" type="datetime1">
               <a:rPr lang="ko-KR" altLang="en-US" smtClean="0"/>
-              <a:t>2026-01-06</a:t>
+              <a:t>2026-01-15</a:t>
             </a:fld>
             <a:endParaRPr lang="ko-KR" altLang="en-US"/>
           </a:p>
@@ -19840,7 +19840,7 @@
           <a:p>
             <a:fld id="{0F78D9C4-20C1-4B15-A116-16DC77AD9A1E}" type="datetime1">
               <a:rPr lang="ko-KR" altLang="en-US" smtClean="0"/>
-              <a:t>2026-01-06</a:t>
+              <a:t>2026-01-15</a:t>
             </a:fld>
             <a:endParaRPr lang="ko-KR" altLang="en-US"/>
           </a:p>
@@ -20231,7 +20231,7 @@
           <a:p>
             <a:fld id="{0D069756-708A-42B2-ADAC-5037042AC683}" type="datetime1">
               <a:rPr lang="ko-KR" altLang="en-US" smtClean="0"/>
-              <a:t>2026-01-06</a:t>
+              <a:t>2026-01-15</a:t>
             </a:fld>
             <a:endParaRPr lang="ko-KR" altLang="en-US"/>
           </a:p>
@@ -20528,7 +20528,7 @@
           <a:p>
             <a:fld id="{DAC7A4FF-ED46-4427-A5F3-196455109A92}" type="datetime1">
               <a:rPr lang="ko-KR" altLang="en-US" smtClean="0"/>
-              <a:t>2026-01-06</a:t>
+              <a:t>2026-01-15</a:t>
             </a:fld>
             <a:endParaRPr lang="ko-KR" altLang="en-US"/>
           </a:p>
@@ -22358,7 +22358,7 @@
           <a:p>
             <a:fld id="{0F78D9C4-20C1-4B15-A116-16DC77AD9A1E}" type="datetime1">
               <a:rPr lang="ko-KR" altLang="en-US" smtClean="0"/>
-              <a:t>2026-01-06</a:t>
+              <a:t>2026-01-15</a:t>
             </a:fld>
             <a:endParaRPr lang="ko-KR" altLang="en-US"/>
           </a:p>
@@ -22559,7 +22559,7 @@
           <a:p>
             <a:fld id="{0F78D9C4-20C1-4B15-A116-16DC77AD9A1E}" type="datetime1">
               <a:rPr lang="ko-KR" altLang="en-US" smtClean="0"/>
-              <a:t>2026-01-06</a:t>
+              <a:t>2026-01-15</a:t>
             </a:fld>
             <a:endParaRPr lang="ko-KR" altLang="en-US"/>
           </a:p>
@@ -24724,12 +24724,8 @@
           <a:lstStyle/>
           <a:p>
             <a:r>
-              <a:rPr lang="en-US" altLang="ko-KR" dirty="0" err="1"/>
-              <a:t>Semactic</a:t>
-            </a:r>
-            <a:r>
               <a:rPr lang="en-US" altLang="ko-KR" dirty="0"/>
-              <a:t> tag</a:t>
+              <a:t>Semantic tag</a:t>
             </a:r>
             <a:endParaRPr lang="ko-KR" altLang="en-US" dirty="0"/>
           </a:p>
@@ -25165,12 +25161,8 @@
           <a:lstStyle/>
           <a:p>
             <a:r>
-              <a:rPr lang="en-US" altLang="ko-KR" dirty="0" err="1"/>
-              <a:t>Semactic</a:t>
-            </a:r>
-            <a:r>
               <a:rPr lang="en-US" altLang="ko-KR" dirty="0"/>
-              <a:t> tag</a:t>
+              <a:t>Semantic tag</a:t>
             </a:r>
             <a:endParaRPr lang="ko-KR" altLang="en-US" dirty="0"/>
           </a:p>
@@ -25809,12 +25801,8 @@
           <a:lstStyle/>
           <a:p>
             <a:r>
-              <a:rPr lang="en-US" altLang="ko-KR" dirty="0" err="1"/>
-              <a:t>Semactic</a:t>
-            </a:r>
-            <a:r>
               <a:rPr lang="en-US" altLang="ko-KR" dirty="0"/>
-              <a:t> tag</a:t>
+              <a:t>Semantic tag</a:t>
             </a:r>
             <a:endParaRPr lang="ko-KR" altLang="en-US" dirty="0"/>
           </a:p>
@@ -26287,12 +26275,8 @@
           <a:lstStyle/>
           <a:p>
             <a:r>
-              <a:rPr lang="en-US" altLang="ko-KR" dirty="0" err="1"/>
-              <a:t>Semactic</a:t>
-            </a:r>
-            <a:r>
               <a:rPr lang="en-US" altLang="ko-KR" dirty="0"/>
-              <a:t> tag</a:t>
+              <a:t>Semantic tag</a:t>
             </a:r>
             <a:endParaRPr lang="ko-KR" altLang="en-US" dirty="0"/>
           </a:p>
@@ -26694,12 +26678,8 @@
           <a:lstStyle/>
           <a:p>
             <a:r>
-              <a:rPr lang="en-US" altLang="ko-KR" dirty="0" err="1"/>
-              <a:t>Semactic</a:t>
-            </a:r>
-            <a:r>
               <a:rPr lang="en-US" altLang="ko-KR" dirty="0"/>
-              <a:t> tag</a:t>
+              <a:t>Semantic tag</a:t>
             </a:r>
             <a:endParaRPr lang="ko-KR" altLang="en-US" dirty="0"/>
           </a:p>
@@ -27131,12 +27111,8 @@
           <a:lstStyle/>
           <a:p>
             <a:r>
-              <a:rPr lang="en-US" altLang="ko-KR" dirty="0" err="1"/>
-              <a:t>Semactic</a:t>
-            </a:r>
-            <a:r>
               <a:rPr lang="en-US" altLang="ko-KR" dirty="0"/>
-              <a:t> tag</a:t>
+              <a:t>Semantic tag</a:t>
             </a:r>
             <a:endParaRPr lang="ko-KR" altLang="en-US" dirty="0"/>
           </a:p>
@@ -27766,12 +27742,8 @@
           <a:lstStyle/>
           <a:p>
             <a:r>
-              <a:rPr lang="en-US" altLang="ko-KR" dirty="0" err="1"/>
-              <a:t>Semactic</a:t>
-            </a:r>
-            <a:r>
               <a:rPr lang="en-US" altLang="ko-KR" dirty="0"/>
-              <a:t> tag</a:t>
+              <a:t>Semantic tag</a:t>
             </a:r>
             <a:endParaRPr lang="ko-KR" altLang="en-US" dirty="0"/>
           </a:p>
@@ -28070,12 +28042,8 @@
               <a:t>왜 </a:t>
             </a:r>
             <a:r>
-              <a:rPr lang="en-US" altLang="ko-KR" dirty="0" err="1"/>
-              <a:t>Semactic</a:t>
-            </a:r>
-            <a:r>
               <a:rPr lang="en-US" altLang="ko-KR" dirty="0"/>
-              <a:t> </a:t>
+              <a:t>Semantic </a:t>
             </a:r>
             <a:r>
               <a:rPr lang="ko-KR" altLang="en-US" dirty="0" err="1"/>
@@ -28610,7 +28578,7 @@
           <a:p>
             <a:fld id="{0F78D9C4-20C1-4B15-A116-16DC77AD9A1E}" type="datetime1">
               <a:rPr lang="ko-KR" altLang="en-US" smtClean="0"/>
-              <a:t>2026-01-06</a:t>
+              <a:t>2026-01-15</a:t>
             </a:fld>
             <a:endParaRPr lang="ko-KR" altLang="en-US"/>
           </a:p>
@@ -29049,7 +29017,7 @@
           <a:p>
             <a:fld id="{0F78D9C4-20C1-4B15-A116-16DC77AD9A1E}" type="datetime1">
               <a:rPr lang="ko-KR" altLang="en-US" smtClean="0"/>
-              <a:t>2026-01-06</a:t>
+              <a:t>2026-01-15</a:t>
             </a:fld>
             <a:endParaRPr lang="ko-KR" altLang="en-US"/>
           </a:p>
